--- a/docs/customer-documents/federal-aan-series/Vol_VII_Book_03_FedAAN_Azure_Control_Compliance_Automation.pptx
+++ b/docs/customer-documents/federal-aan-series/Vol_VII_Book_03_FedAAN_Azure_Control_Compliance_Automation.pptx
@@ -1042,7 +1042,7 @@
           <a:p/>
           <a:p>
             <a:r>
-              <a:t>Vendor sources: uiao repo: inbox/Application Aware Networking/aan-compliance-spine.yml</a:t>
+              <a:t>Vendor sources: host repo: docs/customer-documents/federal-aan-series/aan-compliance-spine.yml</a:t>
             </a:r>
           </a:p>
         </p:txBody>
